--- a/reports/interview_deck.pptx
+++ b/reports/interview_deck.pptx
@@ -3313,7 +3313,7 @@
           <a:lstStyle/>
           <a:p>
             <a:r>
-              <a:t>Canonical synthetic budget result: 0 INR expected value at 50% budget</a:t>
+              <a:t>Synthetic business case: 6.88 INR per eligible user above random at 50% budget</a:t>
             </a:r>
           </a:p>
         </p:txBody>

--- a/reports/interview_deck.pptx
+++ b/reports/interview_deck.pptx
@@ -3313,7 +3313,7 @@
           <a:lstStyle/>
           <a:p>
             <a:r>
-              <a:t>Synthetic business case: 6.88 INR per eligible user above random at 50% budget</a:t>
+              <a:t>Synthetic business case: 5.26 INR per eligible user above random at 50% budget</a:t>
             </a:r>
           </a:p>
         </p:txBody>
